--- a/test_output.pptx
+++ b/test_output.pptx
@@ -3496,7 +3496,7 @@
       </p:sp>
       <p:pic>
         <p:nvPicPr>
-          <p:cNvPr id="9" name="Picture 8" descr="tmpa9co3ra0.png"/>
+          <p:cNvPr id="9" name="Picture 8" descr="tmpnry3rg4j.png"/>
           <p:cNvPicPr>
             <a:picLocks noChangeAspect="1"/>
           </p:cNvPicPr>
